--- a/presentation/nauchny-klubok-NN-v2.pptx
+++ b/presentation/nauchny-klubok-NN-v2.pptx
@@ -3762,7 +3762,7 @@
         <p:spPr>
           <a:xfrm>
             <a:off x="556968" y="1320410"/>
-            <a:ext cx="5303520" cy="798900"/>
+            <a:ext cx="5303520" cy="502920"/>
           </a:xfrm>
           <a:prstGeom prst="rect">
             <a:avLst/>
@@ -3816,7 +3816,7 @@
         </p:nvSpPr>
         <p:spPr>
           <a:xfrm>
-            <a:off x="556975" y="2082410"/>
+            <a:off x="556975" y="1920240"/>
             <a:ext cx="7576200" cy="479400"/>
           </a:xfrm>
           <a:prstGeom prst="rect">
@@ -3846,7 +3846,7 @@
               <a:buNone/>
             </a:pPr>
             <a:r>
-              <a:rPr sz="1600" b="1">
+              <a:rPr sz="1500" b="1">
                 <a:solidFill>
                   <a:srgbClr val="5302E0"/>
                 </a:solidFill>
@@ -3871,8 +3871,8 @@
         </p:nvSpPr>
         <p:spPr>
           <a:xfrm>
-            <a:off x="556975" y="2877810"/>
-            <a:ext cx="8208600" cy="1553100"/>
+            <a:off x="556975" y="2377440"/>
+            <a:ext cx="8208600" cy="2194560"/>
           </a:xfrm>
           <a:prstGeom prst="rect">
             <a:avLst/>
@@ -3890,7 +3890,7 @@
           <a:p>
             <a:pPr indent="0" lvl="0" marL="0" rtl="0" algn="l">
               <a:lnSpc>
-                <a:spcPct val="115000"/>
+                <a:spcPct val="125000"/>
               </a:lnSpc>
               <a:spcBef>
                 <a:spcPts val="0"/>
@@ -3901,13 +3901,13 @@
               <a:buNone/>
             </a:pPr>
             <a:r>
-              <a:rPr sz="1400" b="0">
+              <a:rPr sz="1250" b="0">
                 <a:solidFill>
                   <a:srgbClr val="434343"/>
                 </a:solidFill>
                 <a:latin typeface="Proxima Nova"/>
               </a:rPr>
-              <a:t>2 090 документов (PDF/DOCX/PPTX/XLS + OCR сканов)   •   292 155 уникальных</a:t>
+              <a:t>• 2 090 документов: PDF, DOCX, PPTX, XLS + OCR сканов на GPU</a:t>
             </a:r>
             <a:endParaRPr sz="1800">
               <a:solidFill>
@@ -3922,49 +3922,97 @@
           <a:p>
             <a:pPr>
               <a:lnSpc>
-                <a:spcPct val="115000"/>
-              </a:lnSpc>
-            </a:pPr>
-            <a:r>
-              <a:rPr sz="1400" b="0">
+                <a:spcPct val="125000"/>
+              </a:lnSpc>
+            </a:pPr>
+            <a:r>
+              <a:rPr sz="1250" b="0">
                 <a:solidFill>
                   <a:srgbClr val="434343"/>
                 </a:solidFill>
                 <a:latin typeface="Proxima Nova"/>
               </a:rPr>
-              <a:t>числовых условий (100% верифицированы, дубли — в occurrences)</a:t>
+              <a:t>• 292 155 числовых условий — каждое дословно найдено в источнике (string-match)</a:t>
             </a:r>
           </a:p>
           <a:p>
             <a:pPr>
               <a:lnSpc>
-                <a:spcPct val="115000"/>
-              </a:lnSpc>
-            </a:pPr>
-            <a:r>
-              <a:rPr sz="1400" b="0">
+                <a:spcPct val="125000"/>
+              </a:lnSpc>
+            </a:pPr>
+            <a:r>
+              <a:rPr sz="1250" b="0">
                 <a:solidFill>
                   <a:srgbClr val="434343"/>
                 </a:solidFill>
                 <a:latin typeface="Proxima Nova"/>
               </a:rPr>
-              <a:t>665 LLM-утверждений с дословными цитатами   •   3 000 рёбер противоречий</a:t>
+              <a:t>• 665 утверждений: LLM извлекает по строгой JSON-схеме, цитаты верифицируются</a:t>
             </a:r>
           </a:p>
           <a:p>
             <a:pPr>
               <a:lnSpc>
-                <a:spcPct val="115000"/>
-              </a:lnSpc>
-            </a:pPr>
-            <a:r>
-              <a:rPr sz="1400" b="0">
+                <a:spcPct val="125000"/>
+              </a:lnSpc>
+            </a:pPr>
+            <a:r>
+              <a:rPr sz="1250" b="0">
                 <a:solidFill>
                   <a:srgbClr val="434343"/>
                 </a:solidFill>
                 <a:latin typeface="Proxima Nova"/>
               </a:rPr>
-              <a:t>34 эксперта   •   ответ на сложный запрос — 2–3 секунды</a:t>
+              <a:t>• Граф Kùzu: 8 типов узлов, 19 типов рёбер, обход 3–4 уровней связей &lt; 0.2 c</a:t>
+            </a:r>
+          </a:p>
+          <a:p>
+            <a:pPr>
+              <a:lnSpc>
+                <a:spcPct val="125000"/>
+              </a:lnSpc>
+            </a:pPr>
+            <a:r>
+              <a:rPr sz="1250" b="0">
+                <a:solidFill>
+                  <a:srgbClr val="434343"/>
+                </a:solidFill>
+                <a:latin typeface="Proxima Nova"/>
+              </a:rPr>
+              <a:t>• 3 000 рёбер «источники противоречат» + автопоиск пробелов в знаниях</a:t>
+            </a:r>
+          </a:p>
+          <a:p>
+            <a:pPr>
+              <a:lnSpc>
+                <a:spcPct val="125000"/>
+              </a:lnSpc>
+            </a:pPr>
+            <a:r>
+              <a:rPr sz="1250" b="0">
+                <a:solidFill>
+                  <a:srgbClr val="434343"/>
+                </a:solidFill>
+                <a:latin typeface="Proxima Nova"/>
+              </a:rPr>
+              <a:t>• Тезаурус RU/EN: 88 канонов, 400+ синонимов («электроэкстракция» = «electrowinning»)</a:t>
+            </a:r>
+          </a:p>
+          <a:p>
+            <a:pPr>
+              <a:lnSpc>
+                <a:spcPct val="125000"/>
+              </a:lnSpc>
+            </a:pPr>
+            <a:r>
+              <a:rPr sz="1250" b="0">
+                <a:solidFill>
+                  <a:srgbClr val="434343"/>
+                </a:solidFill>
+                <a:latin typeface="Proxima Nova"/>
+              </a:rPr>
+              <a:t>• Ответ на многопараметрический запрос — 2–3 секунды</a:t>
             </a:r>
           </a:p>
         </p:txBody>
@@ -4694,7 +4742,7 @@
                 </a:solidFill>
                 <a:latin typeface="Proxima Nova"/>
               </a:rPr>
-              <a:t>• Docker/Compose: жюри достаточно docker compose up (данные докачиваются сами)</a:t>
+              <a:t>• Развёртывание одной командой: docker compose up, данные подтягиваются автоматически</a:t>
             </a:r>
           </a:p>
           <a:p>
@@ -4726,7 +4774,7 @@
                 </a:solidFill>
                 <a:latin typeface="Proxima Nova"/>
               </a:rPr>
-              <a:t>• Влезает в стенд проверки с запасом: 12 ядер / 32 ГБ / без GPU</a:t>
+              <a:t>• Новый домен = новые записи тезауруса, онтология не меняется</a:t>
             </a:r>
           </a:p>
           <a:p>
@@ -4742,23 +4790,7 @@
                 </a:solidFill>
                 <a:latin typeface="Proxima Nova"/>
               </a:rPr>
-              <a:t>• Новый домен = новые записи тезауруса, онтология не меняется</a:t>
-            </a:r>
-          </a:p>
-          <a:p>
-            <a:pPr algn="l">
-              <a:lnSpc>
-                <a:spcPct val="115000"/>
-              </a:lnSpc>
-            </a:pPr>
-            <a:r>
-              <a:rPr sz="1400" b="0">
-                <a:solidFill>
-                  <a:srgbClr val="434343"/>
-                </a:solidFill>
-                <a:latin typeface="Proxima Nova"/>
-              </a:rPr>
-              <a:t>• 3 LLM-провайдера с автопереключением: YandexGPT → OpenRouter → GigaChat</a:t>
+              <a:t>• 3 LLM-провайдера с автопереключением: YandexGPT → GigaChat → DeepSeek (open-weights)</a:t>
             </a:r>
           </a:p>
           <a:p>

--- a/presentation/nauchny-klubok-NN-v2.pptx
+++ b/presentation/nauchny-klubok-NN-v2.pptx
@@ -3907,7 +3907,7 @@
                 </a:solidFill>
                 <a:latin typeface="Proxima Nova"/>
               </a:rPr>
-              <a:t>• 2 090 документов: PDF, DOCX, PPTX, XLS + OCR сканов на GPU</a:t>
+              <a:t>• 1 828 уникальных документов: PDF, DOCX, PPTX, XLS + OCR сканов на GPU</a:t>
             </a:r>
             <a:endParaRPr sz="1800">
               <a:solidFill>
@@ -3932,7 +3932,7 @@
                 </a:solidFill>
                 <a:latin typeface="Proxima Nova"/>
               </a:rPr>
-              <a:t>• 292 155 числовых условий — каждое дословно найдено в источнике (string-match)</a:t>
+              <a:t>• 259 304 числовых условия — каждое дословно найдено в источнике (string-match)</a:t>
             </a:r>
           </a:p>
           <a:p>
@@ -4520,7 +4520,7 @@
                 </a:solidFill>
                 <a:latin typeface="Proxima Nova"/>
               </a:rPr>
-              <a:t>• 292 155 чисел: каждое дословно найдено в источнике (string-match), 0 исключений</a:t>
+              <a:t>• 259 304 числа: каждое дословно найдено в источнике (string-match), 0 исключений</a:t>
             </a:r>
           </a:p>
           <a:p>

--- a/presentation/nauchny-klubok-NN-v2.pptx
+++ b/presentation/nauchny-klubok-NN-v2.pptx
@@ -3890,7 +3890,7 @@
           <a:p>
             <a:pPr indent="0" lvl="0" marL="0" rtl="0" algn="l">
               <a:lnSpc>
-                <a:spcPct val="125000"/>
+                <a:spcPct val="120000"/>
               </a:lnSpc>
               <a:spcBef>
                 <a:spcPts val="0"/>
@@ -3901,13 +3901,13 @@
               <a:buNone/>
             </a:pPr>
             <a:r>
-              <a:rPr sz="1250" b="0">
+              <a:rPr sz="1200" b="0">
                 <a:solidFill>
                   <a:srgbClr val="434343"/>
                 </a:solidFill>
                 <a:latin typeface="Proxima Nova"/>
               </a:rPr>
-              <a:t>• 1 828 уникальных документов: PDF, DOCX, PPTX, XLS + OCR сканов на GPU</a:t>
+              <a:t>• 1 828 уникальных документов (дедуп по контент-хэшу): PDF, DOCX, PPTX, XLS + OCR</a:t>
             </a:r>
             <a:endParaRPr sz="1800">
               <a:solidFill>
@@ -3922,11 +3922,11 @@
           <a:p>
             <a:pPr>
               <a:lnSpc>
-                <a:spcPct val="125000"/>
-              </a:lnSpc>
-            </a:pPr>
-            <a:r>
-              <a:rPr sz="1250" b="0">
+                <a:spcPct val="120000"/>
+              </a:lnSpc>
+            </a:pPr>
+            <a:r>
+              <a:rPr sz="1200" b="0">
                 <a:solidFill>
                   <a:srgbClr val="434343"/>
                 </a:solidFill>
@@ -3938,43 +3938,59 @@
           <a:p>
             <a:pPr>
               <a:lnSpc>
-                <a:spcPct val="125000"/>
-              </a:lnSpc>
-            </a:pPr>
-            <a:r>
-              <a:rPr sz="1250" b="0">
+                <a:spcPct val="120000"/>
+              </a:lnSpc>
+            </a:pPr>
+            <a:r>
+              <a:rPr sz="1200" b="0">
                 <a:solidFill>
                   <a:srgbClr val="434343"/>
                 </a:solidFill>
                 <a:latin typeface="Proxima Nova"/>
               </a:rPr>
-              <a:t>• 665 утверждений: LLM извлекает по строгой JSON-схеме, цитаты верифицируются</a:t>
+              <a:t>• 665 утверждений: строгая JSON-схема, дословная цитата хранится в узле графа</a:t>
             </a:r>
           </a:p>
           <a:p>
             <a:pPr>
               <a:lnSpc>
-                <a:spcPct val="125000"/>
-              </a:lnSpc>
-            </a:pPr>
-            <a:r>
-              <a:rPr sz="1250" b="0">
+                <a:spcPct val="120000"/>
+              </a:lnSpc>
+            </a:pPr>
+            <a:r>
+              <a:rPr sz="1200" b="0">
                 <a:solidFill>
                   <a:srgbClr val="434343"/>
                 </a:solidFill>
                 <a:latin typeface="Proxima Nova"/>
               </a:rPr>
+              <a:t>• Строгий AND: пересечение документов по всем числовым условиям сразу (8 из 1828)</a:t>
+            </a:r>
+          </a:p>
+          <a:p>
+            <a:pPr>
+              <a:lnSpc>
+                <a:spcPct val="120000"/>
+              </a:lnSpc>
+            </a:pPr>
+            <a:r>
+              <a:rPr sz="1200" b="0">
+                <a:solidFill>
+                  <a:srgbClr val="434343"/>
+                </a:solidFill>
+                <a:latin typeface="Proxima Nova"/>
+              </a:rPr>
               <a:t>• Граф Kùzu: 8 типов узлов, 19 типов рёбер, обход 3–4 уровней связей &lt; 0.2 c</a:t>
             </a:r>
           </a:p>
           <a:p>
             <a:pPr>
               <a:lnSpc>
-                <a:spcPct val="125000"/>
-              </a:lnSpc>
-            </a:pPr>
-            <a:r>
-              <a:rPr sz="1250" b="0">
+                <a:spcPct val="120000"/>
+              </a:lnSpc>
+            </a:pPr>
+            <a:r>
+              <a:rPr sz="1200" b="0">
                 <a:solidFill>
                   <a:srgbClr val="434343"/>
                 </a:solidFill>
@@ -3986,11 +4002,11 @@
           <a:p>
             <a:pPr>
               <a:lnSpc>
-                <a:spcPct val="125000"/>
-              </a:lnSpc>
-            </a:pPr>
-            <a:r>
-              <a:rPr sz="1250" b="0">
+                <a:spcPct val="120000"/>
+              </a:lnSpc>
+            </a:pPr>
+            <a:r>
+              <a:rPr sz="1200" b="0">
                 <a:solidFill>
                   <a:srgbClr val="434343"/>
                 </a:solidFill>
@@ -4002,11 +4018,11 @@
           <a:p>
             <a:pPr>
               <a:lnSpc>
-                <a:spcPct val="125000"/>
-              </a:lnSpc>
-            </a:pPr>
-            <a:r>
-              <a:rPr sz="1250" b="0">
+                <a:spcPct val="120000"/>
+              </a:lnSpc>
+            </a:pPr>
+            <a:r>
+              <a:rPr sz="1200" b="0">
                 <a:solidFill>
                   <a:srgbClr val="434343"/>
                 </a:solidFill>
@@ -4495,7 +4511,7 @@
         <p:spPr>
           <a:xfrm>
             <a:off x="365760" y="1783080"/>
-            <a:ext cx="8229600" cy="3017520"/>
+            <a:ext cx="8229600" cy="3108960"/>
           </a:xfrm>
           <a:prstGeom prst="rect">
             <a:avLst/>
@@ -4514,7 +4530,7 @@
               </a:lnSpc>
             </a:pPr>
             <a:r>
-              <a:rPr sz="1400" b="0">
+              <a:rPr sz="1300" b="0">
                 <a:solidFill>
                   <a:srgbClr val="434343"/>
                 </a:solidFill>
@@ -4530,13 +4546,13 @@
               </a:lnSpc>
             </a:pPr>
             <a:r>
-              <a:rPr sz="1400" b="0">
+              <a:rPr sz="1300" b="0">
                 <a:solidFill>
                   <a:srgbClr val="434343"/>
                 </a:solidFill>
                 <a:latin typeface="Proxima Nova"/>
               </a:rPr>
-              <a:t>• 665 LLM-утверждений: цитата не совпала → в граф не попадает (отсеяно автоматически)</a:t>
+              <a:t>• 665 LLM-утверждений: цитата не совпала → в граф не попадает; прошла — хранится в узле</a:t>
             </a:r>
           </a:p>
           <a:p>
@@ -4546,13 +4562,13 @@
               </a:lnSpc>
             </a:pPr>
             <a:r>
-              <a:rPr sz="1400" b="0">
+              <a:rPr sz="1300" b="0">
                 <a:solidFill>
                   <a:srgbClr val="434343"/>
                 </a:solidFill>
                 <a:latin typeface="Proxima Nova"/>
               </a:rPr>
-              <a:t>• Уровни достоверности: высокая / средняя / низкая + статус (active / superseded)</a:t>
+              <a:t>• Уровни достоверности + версионирование: active / superseded с указанием замены</a:t>
             </a:r>
           </a:p>
           <a:p>
@@ -4562,13 +4578,13 @@
               </a:lnSpc>
             </a:pPr>
             <a:r>
-              <a:rPr sz="1400" b="0">
+              <a:rPr sz="1300" b="0">
                 <a:solidFill>
                   <a:srgbClr val="434343"/>
                 </a:solidFill>
                 <a:latin typeface="Proxima Nova"/>
               </a:rPr>
-              <a:t>• Зоны разногласий: 3 000 автоматических рёбер «источники расходятся»</a:t>
+              <a:t>• Зоны разногласий: 3 000 рёбер «источники расходятся» (параметр + вещество)</a:t>
             </a:r>
           </a:p>
           <a:p>
@@ -4578,7 +4594,7 @@
               </a:lnSpc>
             </a:pPr>
             <a:r>
-              <a:rPr sz="1400" b="0">
+              <a:rPr sz="1300" b="0">
                 <a:solidFill>
                   <a:srgbClr val="434343"/>
                 </a:solidFill>
@@ -4594,13 +4610,29 @@
               </a:lnSpc>
             </a:pPr>
             <a:r>
-              <a:rPr sz="1400" b="0">
+              <a:rPr sz="1300" b="0">
                 <a:solidFill>
                   <a:srgbClr val="434343"/>
                 </a:solidFill>
                 <a:latin typeface="Proxima Nova"/>
               </a:rPr>
-              <a:t>• Аудит: любой ответ прослеживается до узла графа и строки документа</a:t>
+              <a:t>• Прослеживаемость: любой ответ → узел графа → дословная строка документа</a:t>
+            </a:r>
+          </a:p>
+          <a:p>
+            <a:pPr algn="l">
+              <a:lnSpc>
+                <a:spcPct val="115000"/>
+              </a:lnSpc>
+            </a:pPr>
+            <a:r>
+              <a:rPr sz="1300" b="0">
+                <a:solidFill>
+                  <a:srgbClr val="434343"/>
+                </a:solidFill>
+                <a:latin typeface="Proxima Nova"/>
+              </a:rPr>
+              <a:t>• Безопасность: санитизация вывода, аудит-лог по админ-токену, SHA256 данных</a:t>
             </a:r>
           </a:p>
         </p:txBody>

--- a/presentation/nauchny-klubok-NN-v2.pptx
+++ b/presentation/nauchny-klubok-NN-v2.pptx
@@ -3964,7 +3964,7 @@
                 </a:solidFill>
                 <a:latin typeface="Proxima Nova"/>
               </a:rPr>
-              <a:t>• Строгий AND: пересечение документов по всем числовым условиям сразу (8 из 1828)</a:t>
+              <a:t>• Строгий AND (вложенность интервалов): напр. 55–70°С + 150–300 А/м² → 3 из 1828</a:t>
             </a:r>
           </a:p>
           <a:p>

--- a/presentation/nauchny-klubok-NN-v2.pptx
+++ b/presentation/nauchny-klubok-NN-v2.pptx
@@ -3948,7 +3948,7 @@
                 </a:solidFill>
                 <a:latin typeface="Proxima Nova"/>
               </a:rPr>
-              <a:t>• 665 утверждений: строгая JSON-схема, дословная цитата хранится в узле графа</a:t>
+              <a:t>• 666 утверждений: строгая JSON-схема, дословная цитата хранится в узле графа</a:t>
             </a:r>
           </a:p>
           <a:p>
@@ -4552,7 +4552,7 @@
                 </a:solidFill>
                 <a:latin typeface="Proxima Nova"/>
               </a:rPr>
-              <a:t>• 665 LLM-утверждений: цитата не совпала → в граф не попадает; прошла — хранится в узле</a:t>
+              <a:t>• 666 LLM-утверждений: цитата не совпала → в граф не попадает; прошла — хранится в узле</a:t>
             </a:r>
           </a:p>
           <a:p>
@@ -4600,7 +4600,7 @@
                 </a:solidFill>
                 <a:latin typeface="Proxima Nova"/>
               </a:rPr>
-              <a:t>• Пробелы в знаниях: система честно говорит, чего в корпусе нет</a:t>
+              <a:t>• Пробелы: intent-якоря отличают отсутствующую тему от смежной (⚠️ в ответе)</a:t>
             </a:r>
           </a:p>
           <a:p>
@@ -4616,7 +4616,7 @@
                 </a:solidFill>
                 <a:latin typeface="Proxima Nova"/>
               </a:rPr>
-              <a:t>• Прослеживаемость: любой ответ → узел графа → дословная строка документа</a:t>
+              <a:t>• Прослеживаемость: каждое число прямого ответа → ссылка [узел] → строка документа</a:t>
             </a:r>
           </a:p>
           <a:p>

--- a/presentation/nauchny-klubok-NN-v2.pptx
+++ b/presentation/nauchny-klubok-NN-v2.pptx
@@ -4553,6 +4553,38 @@
                 <a:latin typeface="Proxima Nova"/>
               </a:rPr>
               <a:t>• 666 LLM-утверждений: цитата не совпала → в граф не попадает; прошла — хранится в узле</a:t>
+            </a:r>
+          </a:p>
+          <a:p>
+            <a:pPr algn="l">
+              <a:lnSpc>
+                <a:spcPct val="115000"/>
+              </a:lnSpc>
+            </a:pPr>
+            <a:r>
+              <a:rPr sz="1300" b="0">
+                <a:solidFill>
+                  <a:srgbClr val="434343"/>
+                </a:solidFill>
+                <a:latin typeface="Proxima Nova"/>
+              </a:rPr>
+              <a:t>• Валидаторы ответа: числа, вещества и отрицания сверяются с фактами — иначе</a:t>
+            </a:r>
+          </a:p>
+          <a:p>
+            <a:pPr algn="l">
+              <a:lnSpc>
+                <a:spcPct val="115000"/>
+              </a:lnSpc>
+            </a:pPr>
+            <a:r>
+              <a:rPr sz="1300" b="0">
+                <a:solidFill>
+                  <a:srgbClr val="434343"/>
+                </a:solidFill>
+                <a:latin typeface="Proxima Nova"/>
+              </a:rPr>
+              <a:t>   ответ отдаётся дословными фактами (extractive), а не пересказом LLM</a:t>
             </a:r>
           </a:p>
           <a:p>

--- a/presentation/nauchny-klubok-NN-v2.pptx
+++ b/presentation/nauchny-klubok-NN-v2.pptx
@@ -3761,8 +3761,8 @@
         </p:nvSpPr>
         <p:spPr>
           <a:xfrm>
-            <a:off x="556968" y="1320410"/>
-            <a:ext cx="5303520" cy="502920"/>
+            <a:off x="556968" y="1234440"/>
+            <a:ext cx="7863840" cy="457200"/>
           </a:xfrm>
           <a:prstGeom prst="rect">
             <a:avLst/>
@@ -3791,7 +3791,7 @@
               <a:buNone/>
             </a:pPr>
             <a:r>
-              <a:rPr sz="2700" b="1">
+              <a:rPr sz="2400" b="1">
                 <a:solidFill>
                   <a:srgbClr val="212121"/>
                 </a:solidFill>
@@ -3816,7 +3816,7 @@
         </p:nvSpPr>
         <p:spPr>
           <a:xfrm>
-            <a:off x="556975" y="1920240"/>
+            <a:off x="556975" y="1874519"/>
             <a:ext cx="7576200" cy="479400"/>
           </a:xfrm>
           <a:prstGeom prst="rect">
